--- a/tools/goalmap/out/週次ゴール進捗_2026-W27.pptx
+++ b/tools/goalmap/out/週次ゴール進捗_2026-W27.pptx
@@ -4840,7 +4840,7 @@
       </p:sp>
       <p:pic>
         <p:nvPicPr>
-          <p:cNvPr id="3" name="Picture 2" descr="tmpkyuud2ka.png"/>
+          <p:cNvPr id="3" name="Picture 2" descr="tmp2i9_0vt7.png"/>
           <p:cNvPicPr>
             <a:picLocks noChangeAspect="1"/>
           </p:cNvPicPr>
@@ -5143,7 +5143,7 @@
       </p:sp>
       <p:pic>
         <p:nvPicPr>
-          <p:cNvPr id="3" name="Picture 2" descr="tmphij4_8yh.png"/>
+          <p:cNvPr id="3" name="Picture 2" descr="tmpixnx05qn.png"/>
           <p:cNvPicPr>
             <a:picLocks noChangeAspect="1"/>
           </p:cNvPicPr>
@@ -5446,7 +5446,7 @@
       </p:sp>
       <p:pic>
         <p:nvPicPr>
-          <p:cNvPr id="3" name="Picture 2" descr="tmpe3kw_n5b.png"/>
+          <p:cNvPr id="3" name="Picture 2" descr="tmp30_a74h5.png"/>
           <p:cNvPicPr>
             <a:picLocks noChangeAspect="1"/>
           </p:cNvPicPr>
@@ -5792,7 +5792,7 @@
       </p:sp>
       <p:pic>
         <p:nvPicPr>
-          <p:cNvPr id="3" name="Picture 2" descr="tmpfpf5j54b.png"/>
+          <p:cNvPr id="3" name="Picture 2" descr="tmp6vwolu8z.png"/>
           <p:cNvPicPr>
             <a:picLocks noChangeAspect="1"/>
           </p:cNvPicPr>
@@ -6138,7 +6138,7 @@
       </p:sp>
       <p:pic>
         <p:nvPicPr>
-          <p:cNvPr id="3" name="Picture 2" descr="tmpt0ett7ho.png"/>
+          <p:cNvPr id="3" name="Picture 2" descr="tmpj9fbmk8r.png"/>
           <p:cNvPicPr>
             <a:picLocks noChangeAspect="1"/>
           </p:cNvPicPr>
@@ -6441,7 +6441,7 @@
       </p:sp>
       <p:pic>
         <p:nvPicPr>
-          <p:cNvPr id="3" name="Picture 2" descr="tmp75vpq5jw.png"/>
+          <p:cNvPr id="3" name="Picture 2" descr="tmpzno7fchu.png"/>
           <p:cNvPicPr>
             <a:picLocks noChangeAspect="1"/>
           </p:cNvPicPr>
@@ -6744,7 +6744,7 @@
       </p:sp>
       <p:pic>
         <p:nvPicPr>
-          <p:cNvPr id="3" name="Picture 2" descr="tmp_anso0rf.png"/>
+          <p:cNvPr id="3" name="Picture 2" descr="tmpqglk2xe7.png"/>
           <p:cNvPicPr>
             <a:picLocks noChangeAspect="1"/>
           </p:cNvPicPr>
